--- a/Презентация.pptx
+++ b/Презентация.pptx
@@ -6325,7 +6325,7 @@
                 <a:latin typeface="Times New Roman"/>
                 <a:cs typeface="Times New Roman"/>
               </a:rPr>
-              <a:t>Формалзованное</a:t>
+              <a:t>Формализованное</a:t>
             </a:r>
             <a:r>
               <a:rPr lang="en-GB" sz="3600" spc="-70" dirty="0">
